--- a/sayt/media/resources/2026/10/mehnat-muhofazasi-17-mavzu.pptx
+++ b/sayt/media/resources/2026/10/mehnat-muhofazasi-17-mavzu.pptx
@@ -14686,7 +14686,7 @@
                 </a:solidFill>
                 <a:latin typeface="Georgia"/>
               </a:rPr>
-              <a:t>Tarmoq kabellari (utp/ftp) va kommutatorlar bilan</a:t>
+              <a:t>Tarmoq kabellari (UTP/FTP) va kommutatorlar bilan</a:t>
             </a:r>
             <a:br/>
             <a:r>
